--- a/1차 프로젝트/1. 기획서_V2_.pptx
+++ b/1차 프로젝트/1. 기획서_V2_.pptx
@@ -6684,10 +6684,10 @@
       </p:sp>
       <p:sp>
         <p:nvSpPr>
-          <p:cNvPr id="39" name="TextBox 38">
-            <a:extLst>
-              <a:ext uri="{FF2B5EF4-FFF2-40B4-BE49-F238E27FC236}">
-                <a16:creationId xmlns:a16="http://schemas.microsoft.com/office/drawing/2014/main" id="{520B2A62-ABC5-C062-1DE5-7021749E2F18}"/>
+          <p:cNvPr id="5" name="TextBox 4">
+            <a:extLst>
+              <a:ext uri="{FF2B5EF4-FFF2-40B4-BE49-F238E27FC236}">
+                <a16:creationId xmlns:a16="http://schemas.microsoft.com/office/drawing/2014/main" id="{80DFCDE4-1A58-873F-7779-3225BDC2587E}"/>
               </a:ext>
             </a:extLst>
           </p:cNvPr>
@@ -6696,7 +6696,7 @@
         </p:nvSpPr>
         <p:spPr>
           <a:xfrm>
-            <a:off x="2493079" y="601616"/>
+            <a:off x="2493079" y="684687"/>
             <a:ext cx="8238513" cy="369332"/>
           </a:xfrm>
           <a:prstGeom prst="rect">
@@ -6712,10 +6712,24 @@
           <a:p>
             <a:r>
               <a:rPr lang="ko-KR" altLang="en-US" dirty="0">
+                <a:latin typeface="a시월구일4" panose="02020600000000000000" pitchFamily="18" charset="-127"/>
+                <a:ea typeface="a시월구일4" panose="02020600000000000000" pitchFamily="18" charset="-127"/>
+              </a:rPr>
+              <a:t>자치구별 보건 취약 유형을 도출</a:t>
+            </a:r>
+            <a:r>
+              <a:rPr lang="ko-KR" altLang="en-US" dirty="0">
                 <a:latin typeface="a시월구일1" panose="02020600000000000000" pitchFamily="18" charset="-127"/>
                 <a:ea typeface="a시월구일1" panose="02020600000000000000" pitchFamily="18" charset="-127"/>
               </a:rPr>
-              <a:t>자치구별 보건 취약 유형을 도출하고 정책 의사결정을 지원하는 시스템을 개발</a:t>
+              <a:t>하고 </a:t>
+            </a:r>
+            <a:r>
+              <a:rPr lang="ko-KR" altLang="en-US" dirty="0">
+                <a:latin typeface="a시월구일4" panose="02020600000000000000" pitchFamily="18" charset="-127"/>
+                <a:ea typeface="a시월구일4" panose="02020600000000000000" pitchFamily="18" charset="-127"/>
+              </a:rPr>
+              <a:t>정책 의사결정을 지원하는 시스템을 개발</a:t>
             </a:r>
           </a:p>
         </p:txBody>

--- a/1차 프로젝트/1. 기획서_V2_.pptx
+++ b/1차 프로젝트/1. 기획서_V2_.pptx
@@ -4715,7 +4715,7 @@
                     <a:ea typeface="a시월구일1" panose="02020600000000000000" pitchFamily="18" charset="-127"/>
                     <a:cs typeface="Noto Sans Disp ExtBd" panose="020B0902040504020204" pitchFamily="34"/>
                   </a:rPr>
-                  <a:t>인구 데이터 결함</a:t>
+                  <a:t>인구 데이터 결합</a:t>
                 </a:r>
                 <a:endParaRPr lang="en-US" altLang="ko-KR" sz="1600" dirty="0">
                   <a:latin typeface="a시월구일1" panose="02020600000000000000" pitchFamily="18" charset="-127"/>
